--- a/jarvis_idp_compare.pptx
+++ b/jarvis_idp_compare.pptx
@@ -892,12 +892,7 @@
           <a:solidFill>
             <a:srgbClr val="1B5E37"/>
           </a:solidFill>
-          <a:ln w="12700">
-            <a:solidFill>
-              <a:srgbClr val="1B5E37"/>
-            </a:solidFill>
-            <a:prstDash val="solid"/>
-          </a:ln>
+          <a:ln/>
         </p:spPr>
       </p:sp>
       <p:sp>
@@ -995,12 +990,7 @@
           <a:solidFill>
             <a:srgbClr val="1B5E37"/>
           </a:solidFill>
-          <a:ln w="12700">
-            <a:solidFill>
-              <a:srgbClr val="1B5E37"/>
-            </a:solidFill>
-            <a:prstDash val="solid"/>
-          </a:ln>
+          <a:ln/>
         </p:spPr>
       </p:sp>
       <p:sp>
@@ -1129,18 +1119,15 @@
         <p:spPr>
           <a:xfrm>
             <a:off x="320040" y="1426464"/>
-            <a:ext cx="8503920" cy="0"/>
-          </a:xfrm>
-          <a:prstGeom prst="line">
-            <a:avLst/>
-          </a:prstGeom>
-          <a:noFill/>
-          <a:ln w="19050">
-            <a:solidFill>
-              <a:srgbClr val="5BA872"/>
-            </a:solidFill>
-            <a:prstDash val="solid"/>
-          </a:ln>
+            <a:ext cx="8503920" cy="18288"/>
+          </a:xfrm>
+          <a:prstGeom prst="rect">
+            <a:avLst/>
+          </a:prstGeom>
+          <a:solidFill>
+            <a:srgbClr val="5BA872"/>
+          </a:solidFill>
+          <a:ln/>
         </p:spPr>
       </p:sp>
       <p:sp>
@@ -1246,13 +1233,6 @@
             </a:solidFill>
             <a:prstDash val="solid"/>
           </a:ln>
-          <a:effectLst>
-            <a:outerShdw sx="100000" sy="100000" kx="0" ky="0" algn="bl" rotWithShape="0" blurRad="63500" dist="25400" dir="2700000">
-              <a:srgbClr val="000000">
-                <a:alpha val="8000"/>
-              </a:srgbClr>
-            </a:outerShdw>
-          </a:effectLst>
         </p:spPr>
       </p:sp>
       <p:sp>
@@ -1358,13 +1338,6 @@
             </a:solidFill>
             <a:prstDash val="solid"/>
           </a:ln>
-          <a:effectLst>
-            <a:outerShdw sx="100000" sy="100000" kx="0" ky="0" algn="bl" rotWithShape="0" blurRad="806450000" dist="322580000" dir="162000000000">
-              <a:srgbClr val="000000">
-                <a:alpha val="800000000"/>
-              </a:srgbClr>
-            </a:outerShdw>
-          </a:effectLst>
         </p:spPr>
       </p:sp>
       <p:sp>
@@ -1453,14 +1426,16 @@
         </p:nvSpPr>
         <p:spPr>
           <a:xfrm>
-            <a:off x="2423160" y="2395728"/>
-            <a:ext cx="0" cy="201168"/>
-          </a:xfrm>
-          <a:prstGeom prst="line">
-            <a:avLst/>
-          </a:prstGeom>
-          <a:noFill/>
-          <a:ln w="19050">
+            <a:off x="2286000" y="2395728"/>
+            <a:ext cx="274320" cy="256032"/>
+          </a:xfrm>
+          <a:prstGeom prst="downArrow">
+            <a:avLst/>
+          </a:prstGeom>
+          <a:solidFill>
+            <a:srgbClr val="5BA872"/>
+          </a:solidFill>
+          <a:ln w="12700">
             <a:solidFill>
               <a:srgbClr val="5BA872"/>
             </a:solidFill>
@@ -1476,14 +1451,16 @@
         </p:nvSpPr>
         <p:spPr>
           <a:xfrm>
-            <a:off x="6720840" y="2395728"/>
-            <a:ext cx="0" cy="201168"/>
-          </a:xfrm>
-          <a:prstGeom prst="line">
-            <a:avLst/>
-          </a:prstGeom>
-          <a:noFill/>
-          <a:ln w="19050">
+            <a:off x="6583680" y="2395728"/>
+            <a:ext cx="274320" cy="256032"/>
+          </a:xfrm>
+          <a:prstGeom prst="downArrow">
+            <a:avLst/>
+          </a:prstGeom>
+          <a:solidFill>
+            <a:srgbClr val="5BA872"/>
+          </a:solidFill>
+          <a:ln w="12700">
             <a:solidFill>
               <a:srgbClr val="5BA872"/>
             </a:solidFill>
@@ -1493,85 +1470,7 @@
       </p:sp>
       <p:sp>
         <p:nvSpPr>
-          <p:cNvPr id="20" name="Text 18"/>
-          <p:cNvSpPr/>
-          <p:nvPr/>
-        </p:nvSpPr>
-        <p:spPr>
-          <a:xfrm>
-            <a:off x="2295144" y="2542032"/>
-            <a:ext cx="256032" cy="182880"/>
-          </a:xfrm>
-          <a:prstGeom prst="rect">
-            <a:avLst/>
-          </a:prstGeom>
-          <a:noFill/>
-          <a:ln/>
-        </p:spPr>
-        <p:txBody>
-          <a:bodyPr wrap="square" lIns="0" tIns="0" rIns="0" bIns="0" rtlCol="0" anchor="ctr"/>
-          <a:lstStyle/>
-          <a:p>
-            <a:pPr algn="ctr" indent="0" marL="0">
-              <a:buNone/>
-            </a:pPr>
-            <a:r>
-              <a:rPr lang="en-US" sz="1000" dirty="0">
-                <a:solidFill>
-                  <a:srgbClr val="5BA872"/>
-                </a:solidFill>
-                <a:latin typeface="Calibri" pitchFamily="34" charset="0"/>
-                <a:ea typeface="Calibri" pitchFamily="34" charset="-122"/>
-                <a:cs typeface="Calibri" pitchFamily="34" charset="-120"/>
-              </a:rPr>
-              <a:t>▼</a:t>
-            </a:r>
-            <a:endParaRPr lang="en-US" sz="1000" dirty="0"/>
-          </a:p>
-        </p:txBody>
-      </p:sp>
-      <p:sp>
-        <p:nvSpPr>
-          <p:cNvPr id="21" name="Text 19"/>
-          <p:cNvSpPr/>
-          <p:nvPr/>
-        </p:nvSpPr>
-        <p:spPr>
-          <a:xfrm>
-            <a:off x="6592824" y="2542032"/>
-            <a:ext cx="256032" cy="182880"/>
-          </a:xfrm>
-          <a:prstGeom prst="rect">
-            <a:avLst/>
-          </a:prstGeom>
-          <a:noFill/>
-          <a:ln/>
-        </p:spPr>
-        <p:txBody>
-          <a:bodyPr wrap="square" lIns="0" tIns="0" rIns="0" bIns="0" rtlCol="0" anchor="ctr"/>
-          <a:lstStyle/>
-          <a:p>
-            <a:pPr algn="ctr" indent="0" marL="0">
-              <a:buNone/>
-            </a:pPr>
-            <a:r>
-              <a:rPr lang="en-US" sz="1000" dirty="0">
-                <a:solidFill>
-                  <a:srgbClr val="5BA872"/>
-                </a:solidFill>
-                <a:latin typeface="Calibri" pitchFamily="34" charset="0"/>
-                <a:ea typeface="Calibri" pitchFamily="34" charset="-122"/>
-                <a:cs typeface="Calibri" pitchFamily="34" charset="-120"/>
-              </a:rPr>
-              <a:t>▼</a:t>
-            </a:r>
-            <a:endParaRPr lang="en-US" sz="1000" dirty="0"/>
-          </a:p>
-        </p:txBody>
-      </p:sp>
-      <p:sp>
-        <p:nvSpPr>
-          <p:cNvPr id="22" name="Shape 20"/>
+          <p:cNvPr id="20" name="Shape 18"/>
           <p:cNvSpPr/>
           <p:nvPr/>
         </p:nvSpPr>
@@ -1598,7 +1497,7 @@
       </p:sp>
       <p:sp>
         <p:nvSpPr>
-          <p:cNvPr id="23" name="Text 21"/>
+          <p:cNvPr id="21" name="Text 19"/>
           <p:cNvSpPr/>
           <p:nvPr/>
         </p:nvSpPr>
@@ -1637,7 +1536,7 @@
       </p:sp>
       <p:sp>
         <p:nvSpPr>
-          <p:cNvPr id="24" name="Text 22"/>
+          <p:cNvPr id="22" name="Text 20"/>
           <p:cNvSpPr/>
           <p:nvPr/>
         </p:nvSpPr>
@@ -1676,7 +1575,7 @@
       </p:sp>
       <p:sp>
         <p:nvSpPr>
-          <p:cNvPr id="25" name="Shape 23"/>
+          <p:cNvPr id="23" name="Shape 21"/>
           <p:cNvSpPr/>
           <p:nvPr/>
         </p:nvSpPr>
@@ -1699,18 +1598,11 @@
             </a:solidFill>
             <a:prstDash val="solid"/>
           </a:ln>
-          <a:effectLst>
-            <a:outerShdw sx="100000" sy="100000" kx="0" ky="0" algn="bl" rotWithShape="0" blurRad="10241915000000" dist="4096766000000" dir="9720000000000000">
-              <a:srgbClr val="000000">
-                <a:alpha val="80000000000000"/>
-              </a:srgbClr>
-            </a:outerShdw>
-          </a:effectLst>
-        </p:spPr>
-      </p:sp>
-      <p:sp>
-        <p:nvSpPr>
-          <p:cNvPr id="26" name="Text 24"/>
+        </p:spPr>
+      </p:sp>
+      <p:sp>
+        <p:nvSpPr>
+          <p:cNvPr id="24" name="Text 22"/>
           <p:cNvSpPr/>
           <p:nvPr/>
         </p:nvSpPr>
@@ -1749,7 +1641,7 @@
       </p:sp>
       <p:sp>
         <p:nvSpPr>
-          <p:cNvPr id="27" name="Text 25"/>
+          <p:cNvPr id="25" name="Text 23"/>
           <p:cNvSpPr/>
           <p:nvPr/>
         </p:nvSpPr>
@@ -1788,20 +1680,22 @@
       </p:sp>
       <p:sp>
         <p:nvSpPr>
-          <p:cNvPr id="28" name="Shape 26"/>
-          <p:cNvSpPr/>
-          <p:nvPr/>
-        </p:nvSpPr>
-        <p:spPr>
-          <a:xfrm>
-            <a:off x="4572000" y="3749040"/>
-            <a:ext cx="0" cy="182880"/>
-          </a:xfrm>
-          <a:prstGeom prst="line">
-            <a:avLst/>
-          </a:prstGeom>
-          <a:noFill/>
-          <a:ln w="19050">
+          <p:cNvPr id="26" name="Shape 24"/>
+          <p:cNvSpPr/>
+          <p:nvPr/>
+        </p:nvSpPr>
+        <p:spPr>
+          <a:xfrm>
+            <a:off x="4434840" y="3749040"/>
+            <a:ext cx="274320" cy="237744"/>
+          </a:xfrm>
+          <a:prstGeom prst="downArrow">
+            <a:avLst/>
+          </a:prstGeom>
+          <a:solidFill>
+            <a:srgbClr val="5BA872"/>
+          </a:solidFill>
+          <a:ln w="12700">
             <a:solidFill>
               <a:srgbClr val="5BA872"/>
             </a:solidFill>
@@ -1811,46 +1705,7 @@
       </p:sp>
       <p:sp>
         <p:nvSpPr>
-          <p:cNvPr id="29" name="Text 27"/>
-          <p:cNvSpPr/>
-          <p:nvPr/>
-        </p:nvSpPr>
-        <p:spPr>
-          <a:xfrm>
-            <a:off x="4443984" y="3877056"/>
-            <a:ext cx="256032" cy="182880"/>
-          </a:xfrm>
-          <a:prstGeom prst="rect">
-            <a:avLst/>
-          </a:prstGeom>
-          <a:noFill/>
-          <a:ln/>
-        </p:spPr>
-        <p:txBody>
-          <a:bodyPr wrap="square" lIns="0" tIns="0" rIns="0" bIns="0" rtlCol="0" anchor="ctr"/>
-          <a:lstStyle/>
-          <a:p>
-            <a:pPr algn="ctr" indent="0" marL="0">
-              <a:buNone/>
-            </a:pPr>
-            <a:r>
-              <a:rPr lang="en-US" sz="1000" dirty="0">
-                <a:solidFill>
-                  <a:srgbClr val="5BA872"/>
-                </a:solidFill>
-                <a:latin typeface="Calibri" pitchFamily="34" charset="0"/>
-                <a:ea typeface="Calibri" pitchFamily="34" charset="-122"/>
-                <a:cs typeface="Calibri" pitchFamily="34" charset="-120"/>
-              </a:rPr>
-              <a:t>▼</a:t>
-            </a:r>
-            <a:endParaRPr lang="en-US" sz="1000" dirty="0"/>
-          </a:p>
-        </p:txBody>
-      </p:sp>
-      <p:sp>
-        <p:nvSpPr>
-          <p:cNvPr id="30" name="Shape 28"/>
+          <p:cNvPr id="27" name="Shape 25"/>
           <p:cNvSpPr/>
           <p:nvPr/>
         </p:nvSpPr>
@@ -1877,7 +1732,7 @@
       </p:sp>
       <p:sp>
         <p:nvSpPr>
-          <p:cNvPr id="31" name="Text 29"/>
+          <p:cNvPr id="28" name="Text 26"/>
           <p:cNvSpPr/>
           <p:nvPr/>
         </p:nvSpPr>
@@ -1916,7 +1771,7 @@
       </p:sp>
       <p:sp>
         <p:nvSpPr>
-          <p:cNvPr id="32" name="Text 30"/>
+          <p:cNvPr id="29" name="Text 27"/>
           <p:cNvSpPr/>
           <p:nvPr/>
         </p:nvSpPr>
@@ -1955,7 +1810,7 @@
       </p:sp>
       <p:sp>
         <p:nvSpPr>
-          <p:cNvPr id="33" name="Shape 31"/>
+          <p:cNvPr id="30" name="Shape 28"/>
           <p:cNvSpPr/>
           <p:nvPr/>
         </p:nvSpPr>
@@ -1982,7 +1837,7 @@
       </p:sp>
       <p:sp>
         <p:nvSpPr>
-          <p:cNvPr id="34" name="Text 32"/>
+          <p:cNvPr id="31" name="Text 29"/>
           <p:cNvSpPr/>
           <p:nvPr/>
         </p:nvSpPr>
@@ -2021,7 +1876,7 @@
       </p:sp>
       <p:sp>
         <p:nvSpPr>
-          <p:cNvPr id="35" name="Text 33"/>
+          <p:cNvPr id="32" name="Text 30"/>
           <p:cNvSpPr/>
           <p:nvPr/>
         </p:nvSpPr>
@@ -2060,19 +1915,21 @@
       </p:sp>
       <p:sp>
         <p:nvSpPr>
-          <p:cNvPr id="36" name="Shape 34"/>
-          <p:cNvSpPr/>
-          <p:nvPr/>
-        </p:nvSpPr>
-        <p:spPr>
-          <a:xfrm>
-            <a:off x="3017520" y="3931920"/>
-            <a:ext cx="3108960" cy="0"/>
-          </a:xfrm>
-          <a:prstGeom prst="line">
-            <a:avLst/>
-          </a:prstGeom>
-          <a:noFill/>
+          <p:cNvPr id="33" name="Shape 31"/>
+          <p:cNvSpPr/>
+          <p:nvPr/>
+        </p:nvSpPr>
+        <p:spPr>
+          <a:xfrm>
+            <a:off x="3017520" y="3913632"/>
+            <a:ext cx="3108960" cy="32004"/>
+          </a:xfrm>
+          <a:prstGeom prst="rect">
+            <a:avLst/>
+          </a:prstGeom>
+          <a:solidFill>
+            <a:srgbClr val="5BA872"/>
+          </a:solidFill>
           <a:ln w="12700">
             <a:solidFill>
               <a:srgbClr val="5BA872"/>
@@ -2083,19 +1940,21 @@
       </p:sp>
       <p:sp>
         <p:nvSpPr>
-          <p:cNvPr id="37" name="Shape 35"/>
-          <p:cNvSpPr/>
-          <p:nvPr/>
-        </p:nvSpPr>
-        <p:spPr>
-          <a:xfrm>
-            <a:off x="3017520" y="3931920"/>
-            <a:ext cx="0" cy="109728"/>
-          </a:xfrm>
-          <a:prstGeom prst="line">
-            <a:avLst/>
-          </a:prstGeom>
-          <a:noFill/>
+          <p:cNvPr id="34" name="Shape 32"/>
+          <p:cNvSpPr/>
+          <p:nvPr/>
+        </p:nvSpPr>
+        <p:spPr>
+          <a:xfrm>
+            <a:off x="2999232" y="3913632"/>
+            <a:ext cx="32004" cy="128016"/>
+          </a:xfrm>
+          <a:prstGeom prst="rect">
+            <a:avLst/>
+          </a:prstGeom>
+          <a:solidFill>
+            <a:srgbClr val="5BA872"/>
+          </a:solidFill>
           <a:ln w="12700">
             <a:solidFill>
               <a:srgbClr val="5BA872"/>
@@ -2106,19 +1965,21 @@
       </p:sp>
       <p:sp>
         <p:nvSpPr>
-          <p:cNvPr id="38" name="Shape 36"/>
-          <p:cNvSpPr/>
-          <p:nvPr/>
-        </p:nvSpPr>
-        <p:spPr>
-          <a:xfrm>
-            <a:off x="6126480" y="3931920"/>
-            <a:ext cx="0" cy="109728"/>
-          </a:xfrm>
-          <a:prstGeom prst="line">
-            <a:avLst/>
-          </a:prstGeom>
-          <a:noFill/>
+          <p:cNvPr id="35" name="Shape 33"/>
+          <p:cNvSpPr/>
+          <p:nvPr/>
+        </p:nvSpPr>
+        <p:spPr>
+          <a:xfrm>
+            <a:off x="6108192" y="3913632"/>
+            <a:ext cx="32004" cy="128016"/>
+          </a:xfrm>
+          <a:prstGeom prst="rect">
+            <a:avLst/>
+          </a:prstGeom>
+          <a:solidFill>
+            <a:srgbClr val="5BA872"/>
+          </a:solidFill>
           <a:ln w="12700">
             <a:solidFill>
               <a:srgbClr val="5BA872"/>
